--- a/input/demo.pptx
+++ b/input/demo.pptx
@@ -5,8 +5,8 @@
     <p:sldMasterId id="2147483648" r:id="rId1"/>
   </p:sldMasterIdLst>
   <p:sldIdLst>
-    <p:sldId id="256" r:id="rId7"/>
-    <p:sldId id="257" r:id="rId8"/>
+    <p:sldId id="256" r:id="rId2"/>
+    <p:sldId id="257" r:id="rId3"/>
   </p:sldIdLst>
   <p:sldSz cx="9144000" cy="6858000" type="screen4x3"/>
   <p:notesSz cx="6858000" cy="9144000"/>
@@ -105,6 +105,22 @@
       </a:defRPr>
     </a:lvl9pPr>
   </p:defaultTextStyle>
+  <p:extLst>
+    <p:ext uri="{EFAFB233-063F-42B5-8137-9DF3F51BA10A}">
+      <p15:sldGuideLst xmlns:p15="http://schemas.microsoft.com/office/powerpoint/2012/main">
+        <p15:guide id="1" orient="horz" pos="2160">
+          <p15:clr>
+            <a:srgbClr val="A4A3A4"/>
+          </p15:clr>
+        </p15:guide>
+        <p15:guide id="2" pos="2880">
+          <p15:clr>
+            <a:srgbClr val="A4A3A4"/>
+          </p15:clr>
+        </p15:guide>
+      </p15:sldGuideLst>
+    </p:ext>
+  </p:extLst>
 </p:presentation>
 </file>
 
@@ -146,10 +162,9 @@
           <a:lstStyle/>
           <a:p>
             <a:r>
-              <a:rPr lang="en-US" smtClean="0"/>
+              <a:rPr lang="en-US"/>
               <a:t>Click to edit Master title style</a:t>
             </a:r>
-            <a:endParaRPr lang="en-US"/>
           </a:p>
         </p:txBody>
       </p:sp>
@@ -265,10 +280,9 @@
           </a:lstStyle>
           <a:p>
             <a:r>
-              <a:rPr lang="en-US" smtClean="0"/>
+              <a:rPr lang="en-US"/>
               <a:t>Click to edit Master subtitle style</a:t>
             </a:r>
-            <a:endParaRPr lang="en-US"/>
           </a:p>
         </p:txBody>
       </p:sp>
@@ -289,7 +303,7 @@
           <a:p>
             <a:fld id="{5BCAD085-E8A6-8845-BD4E-CB4CCA059FC4}" type="datetimeFigureOut">
               <a:rPr lang="en-US" smtClean="0"/>
-              <a:t>1/27/13</a:t>
+              <a:t>6/30/2026</a:t>
             </a:fld>
             <a:endParaRPr lang="en-US"/>
           </a:p>
@@ -383,10 +397,9 @@
           <a:lstStyle/>
           <a:p>
             <a:r>
-              <a:rPr lang="en-US" smtClean="0"/>
+              <a:rPr lang="en-US"/>
               <a:t>Click to edit Master title style</a:t>
             </a:r>
-            <a:endParaRPr lang="en-US"/>
           </a:p>
         </p:txBody>
       </p:sp>
@@ -407,38 +420,37 @@
           <a:p>
             <a:pPr lvl="0"/>
             <a:r>
-              <a:rPr lang="en-US" smtClean="0"/>
+              <a:rPr lang="en-US"/>
               <a:t>Click to edit Master text styles</a:t>
             </a:r>
           </a:p>
           <a:p>
             <a:pPr lvl="1"/>
             <a:r>
-              <a:rPr lang="en-US" smtClean="0"/>
+              <a:rPr lang="en-US"/>
               <a:t>Second level</a:t>
             </a:r>
           </a:p>
           <a:p>
             <a:pPr lvl="2"/>
             <a:r>
-              <a:rPr lang="en-US" smtClean="0"/>
+              <a:rPr lang="en-US"/>
               <a:t>Third level</a:t>
             </a:r>
           </a:p>
           <a:p>
             <a:pPr lvl="3"/>
             <a:r>
-              <a:rPr lang="en-US" smtClean="0"/>
+              <a:rPr lang="en-US"/>
               <a:t>Fourth level</a:t>
             </a:r>
           </a:p>
           <a:p>
             <a:pPr lvl="4"/>
             <a:r>
-              <a:rPr lang="en-US" smtClean="0"/>
+              <a:rPr lang="en-US"/>
               <a:t>Fifth level</a:t>
             </a:r>
-            <a:endParaRPr lang="en-US"/>
           </a:p>
         </p:txBody>
       </p:sp>
@@ -459,7 +471,7 @@
           <a:p>
             <a:fld id="{5BCAD085-E8A6-8845-BD4E-CB4CCA059FC4}" type="datetimeFigureOut">
               <a:rPr lang="en-US" smtClean="0"/>
-              <a:t>1/27/13</a:t>
+              <a:t>6/30/2026</a:t>
             </a:fld>
             <a:endParaRPr lang="en-US"/>
           </a:p>
@@ -558,10 +570,9 @@
           <a:lstStyle/>
           <a:p>
             <a:r>
-              <a:rPr lang="en-US" smtClean="0"/>
+              <a:rPr lang="en-US"/>
               <a:t>Click to edit Master title style</a:t>
             </a:r>
-            <a:endParaRPr lang="en-US"/>
           </a:p>
         </p:txBody>
       </p:sp>
@@ -587,38 +598,37 @@
           <a:p>
             <a:pPr lvl="0"/>
             <a:r>
-              <a:rPr lang="en-US" smtClean="0"/>
+              <a:rPr lang="en-US"/>
               <a:t>Click to edit Master text styles</a:t>
             </a:r>
           </a:p>
           <a:p>
             <a:pPr lvl="1"/>
             <a:r>
-              <a:rPr lang="en-US" smtClean="0"/>
+              <a:rPr lang="en-US"/>
               <a:t>Second level</a:t>
             </a:r>
           </a:p>
           <a:p>
             <a:pPr lvl="2"/>
             <a:r>
-              <a:rPr lang="en-US" smtClean="0"/>
+              <a:rPr lang="en-US"/>
               <a:t>Third level</a:t>
             </a:r>
           </a:p>
           <a:p>
             <a:pPr lvl="3"/>
             <a:r>
-              <a:rPr lang="en-US" smtClean="0"/>
+              <a:rPr lang="en-US"/>
               <a:t>Fourth level</a:t>
             </a:r>
           </a:p>
           <a:p>
             <a:pPr lvl="4"/>
             <a:r>
-              <a:rPr lang="en-US" smtClean="0"/>
+              <a:rPr lang="en-US"/>
               <a:t>Fifth level</a:t>
             </a:r>
-            <a:endParaRPr lang="en-US"/>
           </a:p>
         </p:txBody>
       </p:sp>
@@ -639,7 +649,7 @@
           <a:p>
             <a:fld id="{5BCAD085-E8A6-8845-BD4E-CB4CCA059FC4}" type="datetimeFigureOut">
               <a:rPr lang="en-US" smtClean="0"/>
-              <a:t>1/27/13</a:t>
+              <a:t>6/30/2026</a:t>
             </a:fld>
             <a:endParaRPr lang="en-US"/>
           </a:p>
@@ -733,10 +743,9 @@
           <a:lstStyle/>
           <a:p>
             <a:r>
-              <a:rPr lang="en-US" smtClean="0"/>
+              <a:rPr lang="en-US"/>
               <a:t>Click to edit Master title style</a:t>
             </a:r>
-            <a:endParaRPr lang="en-US"/>
           </a:p>
         </p:txBody>
       </p:sp>
@@ -757,38 +766,37 @@
           <a:p>
             <a:pPr lvl="0"/>
             <a:r>
-              <a:rPr lang="en-US" smtClean="0"/>
+              <a:rPr lang="en-US"/>
               <a:t>Click to edit Master text styles</a:t>
             </a:r>
           </a:p>
           <a:p>
             <a:pPr lvl="1"/>
             <a:r>
-              <a:rPr lang="en-US" smtClean="0"/>
+              <a:rPr lang="en-US"/>
               <a:t>Second level</a:t>
             </a:r>
           </a:p>
           <a:p>
             <a:pPr lvl="2"/>
             <a:r>
-              <a:rPr lang="en-US" smtClean="0"/>
+              <a:rPr lang="en-US"/>
               <a:t>Third level</a:t>
             </a:r>
           </a:p>
           <a:p>
             <a:pPr lvl="3"/>
             <a:r>
-              <a:rPr lang="en-US" smtClean="0"/>
+              <a:rPr lang="en-US"/>
               <a:t>Fourth level</a:t>
             </a:r>
           </a:p>
           <a:p>
             <a:pPr lvl="4"/>
             <a:r>
-              <a:rPr lang="en-US" smtClean="0"/>
+              <a:rPr lang="en-US"/>
               <a:t>Fifth level</a:t>
             </a:r>
-            <a:endParaRPr lang="en-US"/>
           </a:p>
         </p:txBody>
       </p:sp>
@@ -809,7 +817,7 @@
           <a:p>
             <a:fld id="{5BCAD085-E8A6-8845-BD4E-CB4CCA059FC4}" type="datetimeFigureOut">
               <a:rPr lang="en-US" smtClean="0"/>
-              <a:t>1/27/13</a:t>
+              <a:t>6/30/2026</a:t>
             </a:fld>
             <a:endParaRPr lang="en-US"/>
           </a:p>
@@ -912,10 +920,9 @@
           </a:lstStyle>
           <a:p>
             <a:r>
-              <a:rPr lang="en-US" smtClean="0"/>
+              <a:rPr lang="en-US"/>
               <a:t>Click to edit Master title style</a:t>
             </a:r>
-            <a:endParaRPr lang="en-US"/>
           </a:p>
         </p:txBody>
       </p:sp>
@@ -1032,7 +1039,7 @@
           <a:p>
             <a:pPr lvl="0"/>
             <a:r>
-              <a:rPr lang="en-US" smtClean="0"/>
+              <a:rPr lang="en-US"/>
               <a:t>Click to edit Master text styles</a:t>
             </a:r>
           </a:p>
@@ -1055,7 +1062,7 @@
           <a:p>
             <a:fld id="{5BCAD085-E8A6-8845-BD4E-CB4CCA059FC4}" type="datetimeFigureOut">
               <a:rPr lang="en-US" smtClean="0"/>
-              <a:t>1/27/13</a:t>
+              <a:t>6/30/2026</a:t>
             </a:fld>
             <a:endParaRPr lang="en-US"/>
           </a:p>
@@ -1149,10 +1156,9 @@
           <a:lstStyle/>
           <a:p>
             <a:r>
-              <a:rPr lang="en-US" smtClean="0"/>
+              <a:rPr lang="en-US"/>
               <a:t>Click to edit Master title style</a:t>
             </a:r>
-            <a:endParaRPr lang="en-US"/>
           </a:p>
         </p:txBody>
       </p:sp>
@@ -1206,38 +1212,37 @@
           <a:p>
             <a:pPr lvl="0"/>
             <a:r>
-              <a:rPr lang="en-US" smtClean="0"/>
+              <a:rPr lang="en-US"/>
               <a:t>Click to edit Master text styles</a:t>
             </a:r>
           </a:p>
           <a:p>
             <a:pPr lvl="1"/>
             <a:r>
-              <a:rPr lang="en-US" smtClean="0"/>
+              <a:rPr lang="en-US"/>
               <a:t>Second level</a:t>
             </a:r>
           </a:p>
           <a:p>
             <a:pPr lvl="2"/>
             <a:r>
-              <a:rPr lang="en-US" smtClean="0"/>
+              <a:rPr lang="en-US"/>
               <a:t>Third level</a:t>
             </a:r>
           </a:p>
           <a:p>
             <a:pPr lvl="3"/>
             <a:r>
-              <a:rPr lang="en-US" smtClean="0"/>
+              <a:rPr lang="en-US"/>
               <a:t>Fourth level</a:t>
             </a:r>
           </a:p>
           <a:p>
             <a:pPr lvl="4"/>
             <a:r>
-              <a:rPr lang="en-US" smtClean="0"/>
+              <a:rPr lang="en-US"/>
               <a:t>Fifth level</a:t>
             </a:r>
-            <a:endParaRPr lang="en-US"/>
           </a:p>
         </p:txBody>
       </p:sp>
@@ -1291,38 +1296,37 @@
           <a:p>
             <a:pPr lvl="0"/>
             <a:r>
-              <a:rPr lang="en-US" smtClean="0"/>
+              <a:rPr lang="en-US"/>
               <a:t>Click to edit Master text styles</a:t>
             </a:r>
           </a:p>
           <a:p>
             <a:pPr lvl="1"/>
             <a:r>
-              <a:rPr lang="en-US" smtClean="0"/>
+              <a:rPr lang="en-US"/>
               <a:t>Second level</a:t>
             </a:r>
           </a:p>
           <a:p>
             <a:pPr lvl="2"/>
             <a:r>
-              <a:rPr lang="en-US" smtClean="0"/>
+              <a:rPr lang="en-US"/>
               <a:t>Third level</a:t>
             </a:r>
           </a:p>
           <a:p>
             <a:pPr lvl="3"/>
             <a:r>
-              <a:rPr lang="en-US" smtClean="0"/>
+              <a:rPr lang="en-US"/>
               <a:t>Fourth level</a:t>
             </a:r>
           </a:p>
           <a:p>
             <a:pPr lvl="4"/>
             <a:r>
-              <a:rPr lang="en-US" smtClean="0"/>
+              <a:rPr lang="en-US"/>
               <a:t>Fifth level</a:t>
             </a:r>
-            <a:endParaRPr lang="en-US"/>
           </a:p>
         </p:txBody>
       </p:sp>
@@ -1343,7 +1347,7 @@
           <a:p>
             <a:fld id="{5BCAD085-E8A6-8845-BD4E-CB4CCA059FC4}" type="datetimeFigureOut">
               <a:rPr lang="en-US" smtClean="0"/>
-              <a:t>1/27/13</a:t>
+              <a:t>6/30/2026</a:t>
             </a:fld>
             <a:endParaRPr lang="en-US"/>
           </a:p>
@@ -1441,10 +1445,9 @@
           </a:lstStyle>
           <a:p>
             <a:r>
-              <a:rPr lang="en-US" smtClean="0"/>
+              <a:rPr lang="en-US"/>
               <a:t>Click to edit Master title style</a:t>
             </a:r>
-            <a:endParaRPr lang="en-US"/>
           </a:p>
         </p:txBody>
       </p:sp>
@@ -1507,7 +1510,7 @@
           <a:p>
             <a:pPr lvl="0"/>
             <a:r>
-              <a:rPr lang="en-US" smtClean="0"/>
+              <a:rPr lang="en-US"/>
               <a:t>Click to edit Master text styles</a:t>
             </a:r>
           </a:p>
@@ -1563,38 +1566,37 @@
           <a:p>
             <a:pPr lvl="0"/>
             <a:r>
-              <a:rPr lang="en-US" smtClean="0"/>
+              <a:rPr lang="en-US"/>
               <a:t>Click to edit Master text styles</a:t>
             </a:r>
           </a:p>
           <a:p>
             <a:pPr lvl="1"/>
             <a:r>
-              <a:rPr lang="en-US" smtClean="0"/>
+              <a:rPr lang="en-US"/>
               <a:t>Second level</a:t>
             </a:r>
           </a:p>
           <a:p>
             <a:pPr lvl="2"/>
             <a:r>
-              <a:rPr lang="en-US" smtClean="0"/>
+              <a:rPr lang="en-US"/>
               <a:t>Third level</a:t>
             </a:r>
           </a:p>
           <a:p>
             <a:pPr lvl="3"/>
             <a:r>
-              <a:rPr lang="en-US" smtClean="0"/>
+              <a:rPr lang="en-US"/>
               <a:t>Fourth level</a:t>
             </a:r>
           </a:p>
           <a:p>
             <a:pPr lvl="4"/>
             <a:r>
-              <a:rPr lang="en-US" smtClean="0"/>
+              <a:rPr lang="en-US"/>
               <a:t>Fifth level</a:t>
             </a:r>
-            <a:endParaRPr lang="en-US"/>
           </a:p>
         </p:txBody>
       </p:sp>
@@ -1657,7 +1659,7 @@
           <a:p>
             <a:pPr lvl="0"/>
             <a:r>
-              <a:rPr lang="en-US" smtClean="0"/>
+              <a:rPr lang="en-US"/>
               <a:t>Click to edit Master text styles</a:t>
             </a:r>
           </a:p>
@@ -1713,38 +1715,37 @@
           <a:p>
             <a:pPr lvl="0"/>
             <a:r>
-              <a:rPr lang="en-US" smtClean="0"/>
+              <a:rPr lang="en-US"/>
               <a:t>Click to edit Master text styles</a:t>
             </a:r>
           </a:p>
           <a:p>
             <a:pPr lvl="1"/>
             <a:r>
-              <a:rPr lang="en-US" smtClean="0"/>
+              <a:rPr lang="en-US"/>
               <a:t>Second level</a:t>
             </a:r>
           </a:p>
           <a:p>
             <a:pPr lvl="2"/>
             <a:r>
-              <a:rPr lang="en-US" smtClean="0"/>
+              <a:rPr lang="en-US"/>
               <a:t>Third level</a:t>
             </a:r>
           </a:p>
           <a:p>
             <a:pPr lvl="3"/>
             <a:r>
-              <a:rPr lang="en-US" smtClean="0"/>
+              <a:rPr lang="en-US"/>
               <a:t>Fourth level</a:t>
             </a:r>
           </a:p>
           <a:p>
             <a:pPr lvl="4"/>
             <a:r>
-              <a:rPr lang="en-US" smtClean="0"/>
+              <a:rPr lang="en-US"/>
               <a:t>Fifth level</a:t>
             </a:r>
-            <a:endParaRPr lang="en-US"/>
           </a:p>
         </p:txBody>
       </p:sp>
@@ -1765,7 +1766,7 @@
           <a:p>
             <a:fld id="{5BCAD085-E8A6-8845-BD4E-CB4CCA059FC4}" type="datetimeFigureOut">
               <a:rPr lang="en-US" smtClean="0"/>
-              <a:t>1/27/13</a:t>
+              <a:t>6/30/2026</a:t>
             </a:fld>
             <a:endParaRPr lang="en-US"/>
           </a:p>
@@ -1859,10 +1860,9 @@
           <a:lstStyle/>
           <a:p>
             <a:r>
-              <a:rPr lang="en-US" smtClean="0"/>
+              <a:rPr lang="en-US"/>
               <a:t>Click to edit Master title style</a:t>
             </a:r>
-            <a:endParaRPr lang="en-US"/>
           </a:p>
         </p:txBody>
       </p:sp>
@@ -1883,7 +1883,7 @@
           <a:p>
             <a:fld id="{5BCAD085-E8A6-8845-BD4E-CB4CCA059FC4}" type="datetimeFigureOut">
               <a:rPr lang="en-US" smtClean="0"/>
-              <a:t>1/27/13</a:t>
+              <a:t>6/30/2026</a:t>
             </a:fld>
             <a:endParaRPr lang="en-US"/>
           </a:p>
@@ -1978,7 +1978,7 @@
           <a:p>
             <a:fld id="{5BCAD085-E8A6-8845-BD4E-CB4CCA059FC4}" type="datetimeFigureOut">
               <a:rPr lang="en-US" smtClean="0"/>
-              <a:t>1/27/13</a:t>
+              <a:t>6/30/2026</a:t>
             </a:fld>
             <a:endParaRPr lang="en-US"/>
           </a:p>
@@ -2081,10 +2081,9 @@
           </a:lstStyle>
           <a:p>
             <a:r>
-              <a:rPr lang="en-US" smtClean="0"/>
+              <a:rPr lang="en-US"/>
               <a:t>Click to edit Master title style</a:t>
             </a:r>
-            <a:endParaRPr lang="en-US"/>
           </a:p>
         </p:txBody>
       </p:sp>
@@ -2138,38 +2137,37 @@
           <a:p>
             <a:pPr lvl="0"/>
             <a:r>
-              <a:rPr lang="en-US" smtClean="0"/>
+              <a:rPr lang="en-US"/>
               <a:t>Click to edit Master text styles</a:t>
             </a:r>
           </a:p>
           <a:p>
             <a:pPr lvl="1"/>
             <a:r>
-              <a:rPr lang="en-US" smtClean="0"/>
+              <a:rPr lang="en-US"/>
               <a:t>Second level</a:t>
             </a:r>
           </a:p>
           <a:p>
             <a:pPr lvl="2"/>
             <a:r>
-              <a:rPr lang="en-US" smtClean="0"/>
+              <a:rPr lang="en-US"/>
               <a:t>Third level</a:t>
             </a:r>
           </a:p>
           <a:p>
             <a:pPr lvl="3"/>
             <a:r>
-              <a:rPr lang="en-US" smtClean="0"/>
+              <a:rPr lang="en-US"/>
               <a:t>Fourth level</a:t>
             </a:r>
           </a:p>
           <a:p>
             <a:pPr lvl="4"/>
             <a:r>
-              <a:rPr lang="en-US" smtClean="0"/>
+              <a:rPr lang="en-US"/>
               <a:t>Fifth level</a:t>
             </a:r>
-            <a:endParaRPr lang="en-US"/>
           </a:p>
         </p:txBody>
       </p:sp>
@@ -2232,7 +2230,7 @@
           <a:p>
             <a:pPr lvl="0"/>
             <a:r>
-              <a:rPr lang="en-US" smtClean="0"/>
+              <a:rPr lang="en-US"/>
               <a:t>Click to edit Master text styles</a:t>
             </a:r>
           </a:p>
@@ -2255,7 +2253,7 @@
           <a:p>
             <a:fld id="{5BCAD085-E8A6-8845-BD4E-CB4CCA059FC4}" type="datetimeFigureOut">
               <a:rPr lang="en-US" smtClean="0"/>
-              <a:t>1/27/13</a:t>
+              <a:t>6/30/2026</a:t>
             </a:fld>
             <a:endParaRPr lang="en-US"/>
           </a:p>
@@ -2358,10 +2356,9 @@
           </a:lstStyle>
           <a:p>
             <a:r>
-              <a:rPr lang="en-US" smtClean="0"/>
+              <a:rPr lang="en-US"/>
               <a:t>Click to edit Master title style</a:t>
             </a:r>
-            <a:endParaRPr lang="en-US"/>
           </a:p>
         </p:txBody>
       </p:sp>
@@ -2485,7 +2482,7 @@
           <a:p>
             <a:pPr lvl="0"/>
             <a:r>
-              <a:rPr lang="en-US" smtClean="0"/>
+              <a:rPr lang="en-US"/>
               <a:t>Click to edit Master text styles</a:t>
             </a:r>
           </a:p>
@@ -2508,7 +2505,7 @@
           <a:p>
             <a:fld id="{5BCAD085-E8A6-8845-BD4E-CB4CCA059FC4}" type="datetimeFigureOut">
               <a:rPr lang="en-US" smtClean="0"/>
-              <a:t>1/27/13</a:t>
+              <a:t>6/30/2026</a:t>
             </a:fld>
             <a:endParaRPr lang="en-US"/>
           </a:p>
@@ -2617,10 +2614,9 @@
           <a:lstStyle/>
           <a:p>
             <a:r>
-              <a:rPr lang="en-US" smtClean="0"/>
+              <a:rPr lang="en-US"/>
               <a:t>Click to edit Master title style</a:t>
             </a:r>
-            <a:endParaRPr lang="en-US"/>
           </a:p>
         </p:txBody>
       </p:sp>
@@ -2651,38 +2647,37 @@
           <a:p>
             <a:pPr lvl="0"/>
             <a:r>
-              <a:rPr lang="en-US" smtClean="0"/>
+              <a:rPr lang="en-US"/>
               <a:t>Click to edit Master text styles</a:t>
             </a:r>
           </a:p>
           <a:p>
             <a:pPr lvl="1"/>
             <a:r>
-              <a:rPr lang="en-US" smtClean="0"/>
+              <a:rPr lang="en-US"/>
               <a:t>Second level</a:t>
             </a:r>
           </a:p>
           <a:p>
             <a:pPr lvl="2"/>
             <a:r>
-              <a:rPr lang="en-US" smtClean="0"/>
+              <a:rPr lang="en-US"/>
               <a:t>Third level</a:t>
             </a:r>
           </a:p>
           <a:p>
             <a:pPr lvl="3"/>
             <a:r>
-              <a:rPr lang="en-US" smtClean="0"/>
+              <a:rPr lang="en-US"/>
               <a:t>Fourth level</a:t>
             </a:r>
           </a:p>
           <a:p>
             <a:pPr lvl="4"/>
             <a:r>
-              <a:rPr lang="en-US" smtClean="0"/>
+              <a:rPr lang="en-US"/>
               <a:t>Fifth level</a:t>
             </a:r>
-            <a:endParaRPr lang="en-US"/>
           </a:p>
         </p:txBody>
       </p:sp>
@@ -2721,7 +2716,7 @@
           <a:p>
             <a:fld id="{5BCAD085-E8A6-8845-BD4E-CB4CCA059FC4}" type="datetimeFigureOut">
               <a:rPr lang="en-US" smtClean="0"/>
-              <a:t>1/27/13</a:t>
+              <a:t>6/30/2026</a:t>
             </a:fld>
             <a:endParaRPr lang="en-US"/>
           </a:p>
@@ -3080,7 +3075,7 @@
 </file>
 
 <file path=ppt/slides/slide1.xml><?xml version="1.0" encoding="utf-8"?>
-<p:sld xmlns:a="http://schemas.openxmlformats.org/drawingml/2006/main" xmlns:p="http://schemas.openxmlformats.org/presentationml/2006/main" xmlns:r="http://schemas.openxmlformats.org/officeDocument/2006/relationships">
+<p:sld xmlns:a="http://schemas.openxmlformats.org/drawingml/2006/main" xmlns:r="http://schemas.openxmlformats.org/officeDocument/2006/relationships" xmlns:p="http://schemas.openxmlformats.org/presentationml/2006/main">
   <p:cSld>
     <p:spTree>
       <p:nvGrpSpPr>
@@ -3088,7 +3083,14 @@
         <p:cNvGrpSpPr/>
         <p:nvPr/>
       </p:nvGrpSpPr>
-      <p:grpSpPr/>
+      <p:grpSpPr>
+        <a:xfrm>
+          <a:off x="0" y="0"/>
+          <a:ext cx="0" cy="0"/>
+          <a:chOff x="0" y="0"/>
+          <a:chExt cx="0" cy="0"/>
+        </a:xfrm>
+      </p:grpSpPr>
       <p:sp>
         <p:nvSpPr>
           <p:cNvPr id="2" name="Title 1"/>
@@ -3105,8 +3107,14 @@
           <a:lstStyle/>
           <a:p>
             <a:r>
-              <a:t>广东跃昉科技有限公司</a:t>
-            </a:r>
+              <a:rPr lang="en-US" altLang="zh-CN" dirty="0"/>
+              <a:t>××××</a:t>
+            </a:r>
+            <a:r>
+              <a:rPr dirty="0" err="1"/>
+              <a:t>科技有限公司</a:t>
+            </a:r>
+            <a:endParaRPr dirty="0"/>
           </a:p>
         </p:txBody>
       </p:sp>
@@ -3119,7 +3127,7 @@
         <p:spPr>
           <a:xfrm>
             <a:off x="1000000" y="1600000"/>
-            <a:ext cx="7000000" cy="1000000"/>
+            <a:ext cx="2222083" cy="369332"/>
           </a:xfrm>
           <a:prstGeom prst="rect">
             <a:avLst/>
@@ -3133,8 +3141,18 @@
           <a:lstStyle/>
           <a:p>
             <a:r>
-              <a:t>聚焦研发基于RISC-V架构的边缘AI芯片</a:t>
-            </a:r>
+              <a:rPr dirty="0" err="1"/>
+              <a:t>聚焦研发</a:t>
+            </a:r>
+            <a:r>
+              <a:rPr lang="zh-CN" altLang="en-US" dirty="0"/>
+              <a:t>边缘</a:t>
+            </a:r>
+            <a:r>
+              <a:rPr dirty="0" err="1"/>
+              <a:t>AI芯片</a:t>
+            </a:r>
+            <a:endParaRPr dirty="0"/>
           </a:p>
         </p:txBody>
       </p:sp>
@@ -3147,7 +3165,7 @@
 </file>
 
 <file path=ppt/slides/slide2.xml><?xml version="1.0" encoding="utf-8"?>
-<p:sld xmlns:a="http://schemas.openxmlformats.org/drawingml/2006/main" xmlns:p="http://schemas.openxmlformats.org/presentationml/2006/main" xmlns:r="http://schemas.openxmlformats.org/officeDocument/2006/relationships">
+<p:sld xmlns:a="http://schemas.openxmlformats.org/drawingml/2006/main" xmlns:r="http://schemas.openxmlformats.org/officeDocument/2006/relationships" xmlns:p="http://schemas.openxmlformats.org/presentationml/2006/main">
   <p:cSld>
     <p:spTree>
       <p:nvGrpSpPr>
@@ -3155,7 +3173,14 @@
         <p:cNvGrpSpPr/>
         <p:nvPr/>
       </p:nvGrpSpPr>
-      <p:grpSpPr/>
+      <p:grpSpPr>
+        <a:xfrm>
+          <a:off x="0" y="0"/>
+          <a:ext cx="0" cy="0"/>
+          <a:chOff x="0" y="0"/>
+          <a:chExt cx="0" cy="0"/>
+        </a:xfrm>
+      </p:grpSpPr>
       <p:sp>
         <p:nvSpPr>
           <p:cNvPr id="2" name="Title 1"/>
